--- a/반도체_고객세미나_2026.7.14.pptx
+++ b/반도체_고객세미나_2026.7.14.pptx
@@ -6411,7 +6411,7 @@
                 <a:latin typeface="맑은 고딕"/>
                 <a:ea typeface="맑은 고딕"/>
               </a:rPr>
-              <a:t>12M fwd P/E 5배대, 현재가(약 184.5만원) 대비 큰 상승여력</a:t>
+              <a:t>12M fwd P/E 5배대, 현재가(약 190만원) 대비 큰 상승여력</a:t>
             </a:r>
           </a:p>
         </p:txBody>
@@ -14599,7 +14599,7 @@
                 <a:latin typeface="맑은 고딕"/>
                 <a:ea typeface="맑은 고딕"/>
               </a:rPr>
-              <a:t>최근 급변동 — 흥행 급등에서 서킷브레이커까지 (7/10 → 7/13)</a:t>
+              <a:t>최근 급변동 — 급등·폭락·반등의 3거래일 (7/10 → 7/14)</a:t>
             </a:r>
           </a:p>
         </p:txBody>
@@ -14612,8 +14612,8 @@
         </p:nvSpPr>
         <p:spPr>
           <a:xfrm>
-            <a:off x="566928" y="1560000"/>
-            <a:ext cx="11064240" cy="940000"/>
+            <a:off x="566928" y="1500000"/>
+            <a:ext cx="11064240" cy="740000"/>
           </a:xfrm>
           <a:prstGeom prst="roundRect">
             <a:avLst>
@@ -14658,8 +14658,8 @@
         </p:nvSpPr>
         <p:spPr>
           <a:xfrm>
-            <a:off x="820000" y="1620000"/>
-            <a:ext cx="10560000" cy="820000"/>
+            <a:off x="820000" y="1555000"/>
+            <a:ext cx="10560000" cy="630000"/>
           </a:xfrm>
           <a:prstGeom prst="rect">
             <a:avLst/>
@@ -14672,17 +14672,17 @@
           <a:p>
             <a:pPr algn="l">
               <a:lnSpc>
-                <a:spcPct val="120000"/>
-              </a:lnSpc>
-              <a:spcBef>
-                <a:spcPts val="0"/>
-              </a:spcBef>
-              <a:spcAft>
-                <a:spcPts val="0"/>
-              </a:spcAft>
-            </a:pPr>
-            <a:r>
-              <a:rPr sz="1300" b="1" i="0">
+                <a:spcPct val="118000"/>
+              </a:lnSpc>
+              <a:spcBef>
+                <a:spcPts val="0"/>
+              </a:spcBef>
+              <a:spcAft>
+                <a:spcPts val="0"/>
+              </a:spcAft>
+            </a:pPr>
+            <a:r>
+              <a:rPr sz="1250" b="1" i="0">
                 <a:solidFill>
                   <a:srgbClr val="3E6FB0"/>
                 </a:solidFill>
@@ -14692,14 +14692,14 @@
               <a:t>7/10 (금) 흥행 급등  </a:t>
             </a:r>
             <a:r>
-              <a:rPr sz="1150" b="0" i="0">
+              <a:rPr sz="1100" b="0" i="0">
                 <a:solidFill>
                   <a:srgbClr val="536174"/>
                 </a:solidFill>
                 <a:latin typeface="맑은 고딕"/>
                 <a:ea typeface="맑은 고딕"/>
               </a:rPr>
-              <a:t>SK하이닉스 나스닥 ADR 데뷔 +13%·기관 1.1조 순매수 → 코스피 +2.5%(7,475.94). 삼성전자 +5.0%(29.2만)·SK하이닉스 +2%(223만).</a:t>
+              <a:t>SK하이닉스 나스닥 ADR 데뷔 +13%·기관 대량 순매수 → 코스피 +2.5%(7,475.94). 삼성전자 +5.0%·SK하이닉스 +2%.</a:t>
             </a:r>
           </a:p>
         </p:txBody>
@@ -14712,8 +14712,8 @@
         </p:nvSpPr>
         <p:spPr>
           <a:xfrm>
-            <a:off x="566928" y="2600000"/>
-            <a:ext cx="11064240" cy="1000000"/>
+            <a:off x="566928" y="2300000"/>
+            <a:ext cx="11064240" cy="1140000"/>
           </a:xfrm>
           <a:prstGeom prst="roundRect">
             <a:avLst>
@@ -14758,8 +14758,8 @@
         </p:nvSpPr>
         <p:spPr>
           <a:xfrm>
-            <a:off x="820000" y="2660000"/>
-            <a:ext cx="10560000" cy="880000"/>
+            <a:off x="820000" y="2355000"/>
+            <a:ext cx="10560000" cy="1030000"/>
           </a:xfrm>
           <a:prstGeom prst="rect">
             <a:avLst/>
@@ -14772,34 +14772,34 @@
           <a:p>
             <a:pPr algn="l">
               <a:lnSpc>
-                <a:spcPct val="120000"/>
-              </a:lnSpc>
-              <a:spcBef>
-                <a:spcPts val="0"/>
-              </a:spcBef>
-              <a:spcAft>
-                <a:spcPts val="0"/>
-              </a:spcAft>
-            </a:pPr>
-            <a:r>
-              <a:rPr sz="1300" b="1" i="0">
+                <a:spcPct val="118000"/>
+              </a:lnSpc>
+              <a:spcBef>
+                <a:spcPts val="0"/>
+              </a:spcBef>
+              <a:spcAft>
+                <a:spcPts val="0"/>
+              </a:spcAft>
+            </a:pPr>
+            <a:r>
+              <a:rPr sz="1250" b="1" i="0">
                 <a:solidFill>
                   <a:srgbClr val="D64545"/>
                 </a:solidFill>
                 <a:latin typeface="맑은 고딕"/>
                 <a:ea typeface="맑은 고딕"/>
               </a:rPr>
-              <a:t>7/13 (월) 반전 폭락  </a:t>
-            </a:r>
-            <a:r>
-              <a:rPr sz="1150" b="0" i="0">
+              <a:t>7/13 (월) 블랙먼데이  </a:t>
+            </a:r>
+            <a:r>
+              <a:rPr sz="1100" b="0" i="0">
                 <a:solidFill>
                   <a:srgbClr val="536174"/>
                 </a:solidFill>
                 <a:latin typeface="맑은 고딕"/>
                 <a:ea typeface="맑은 고딕"/>
               </a:rPr>
-              <a:t>코스피 -8.95%(6,806.93), 7,000선 붕괴·올해 7번째 서킷브레이커(13:28). 삼성전자 -10.7%(25.5만)·SK하이닉스 -15.4%(184.5만, 200만선 붕괴). 외국인 -1.7조·기관 -2.2조 순매도.</a:t>
+              <a:t>코스피 -8.95%(6,806.93)·7,000선 붕괴, 올해 7번째 서킷브레이커. 삼성전자 -10.7%(25.5만)·SK하이닉스 -15.4%(184.5만). 원인 ① 차익실현(연초 +340% 부담) ② 피크아웃 우려(한투 SK 2Q 영업익 60.4조 &lt; 컨센 65조) ③ 단일종목 레버리지 ETF 리밸런싱 ④ 이란·호르무즈 유가 급등.</a:t>
             </a:r>
           </a:p>
         </p:txBody>
@@ -14812,8 +14812,8 @@
         </p:nvSpPr>
         <p:spPr>
           <a:xfrm>
-            <a:off x="566928" y="3700000"/>
-            <a:ext cx="11064240" cy="1000000"/>
+            <a:off x="566928" y="3500000"/>
+            <a:ext cx="11064240" cy="980000"/>
           </a:xfrm>
           <a:prstGeom prst="roundRect">
             <a:avLst>
@@ -14821,7 +14821,7 @@
             </a:avLst>
           </a:prstGeom>
           <a:solidFill>
-            <a:srgbClr val="F2F5F9"/>
+            <a:srgbClr val="EAF3EE"/>
           </a:solidFill>
           <a:ln>
             <a:noFill/>
@@ -14858,8 +14858,8 @@
         </p:nvSpPr>
         <p:spPr>
           <a:xfrm>
-            <a:off x="820000" y="3760000"/>
-            <a:ext cx="10560000" cy="880000"/>
+            <a:off x="820000" y="3555000"/>
+            <a:ext cx="10560000" cy="870000"/>
           </a:xfrm>
           <a:prstGeom prst="rect">
             <a:avLst/>
@@ -14872,34 +14872,34 @@
           <a:p>
             <a:pPr algn="l">
               <a:lnSpc>
-                <a:spcPct val="120000"/>
-              </a:lnSpc>
-              <a:spcBef>
-                <a:spcPts val="0"/>
-              </a:spcBef>
-              <a:spcAft>
-                <a:spcPts val="0"/>
-              </a:spcAft>
-            </a:pPr>
-            <a:r>
-              <a:rPr sz="1300" b="1" i="0">
-                <a:solidFill>
-                  <a:srgbClr val="E8A93B"/>
-                </a:solidFill>
-                <a:latin typeface="맑은 고딕"/>
-                <a:ea typeface="맑은 고딕"/>
-              </a:rPr>
-              <a:t>급락 4대 원인  </a:t>
-            </a:r>
-            <a:r>
-              <a:rPr sz="1150" b="0" i="0">
+                <a:spcPct val="118000"/>
+              </a:lnSpc>
+              <a:spcBef>
+                <a:spcPts val="0"/>
+              </a:spcBef>
+              <a:spcAft>
+                <a:spcPts val="0"/>
+              </a:spcAft>
+            </a:pPr>
+            <a:r>
+              <a:rPr sz="1250" b="1" i="0">
+                <a:solidFill>
+                  <a:srgbClr val="2E7D57"/>
+                </a:solidFill>
+                <a:latin typeface="맑은 고딕"/>
+                <a:ea typeface="맑은 고딕"/>
+              </a:rPr>
+              <a:t>7/14 (화) 반등 시도  </a:t>
+            </a:r>
+            <a:r>
+              <a:rPr sz="1100" b="0" i="0">
                 <a:solidFill>
                   <a:srgbClr val="536174"/>
                 </a:solidFill>
                 <a:latin typeface="맑은 고딕"/>
                 <a:ea typeface="맑은 고딕"/>
               </a:rPr>
-              <a:t>① 차익실현(연초 대비 +340% 부담) ② 피크아웃 우려(한투 SK 2Q 영업익 60.4조 &lt; 컨센 65조) ③ 단일종목 레버리지 ETF 리밸런싱 수급 ④ 이란·호르무즈 리스크에 유가 급등·글로벌 위험회피.</a:t>
+              <a:t>저가매수 유입, 코스피 +1%대(약 6,880). 삼성전자 +5%대(약 26.8만)·SK하이닉스 +3~4%(190만선 회복). 현물서 외국인 +0.8조·기관 +2조 동반 순매수 + 외국인 선물 순매수(개인 -2.8조).</a:t>
             </a:r>
           </a:p>
         </p:txBody>
@@ -14912,8 +14912,8 @@
         </p:nvSpPr>
         <p:spPr>
           <a:xfrm>
-            <a:off x="566928" y="4800000"/>
-            <a:ext cx="11064240" cy="1120000"/>
+            <a:off x="566928" y="4520000"/>
+            <a:ext cx="11064240" cy="1260000"/>
           </a:xfrm>
           <a:prstGeom prst="roundRect">
             <a:avLst>
@@ -14958,8 +14958,8 @@
         </p:nvSpPr>
         <p:spPr>
           <a:xfrm>
-            <a:off x="820000" y="4860000"/>
-            <a:ext cx="10560000" cy="1000000"/>
+            <a:off x="820000" y="4575000"/>
+            <a:ext cx="10560000" cy="1150000"/>
           </a:xfrm>
           <a:prstGeom prst="rect">
             <a:avLst/>
@@ -14982,34 +14982,34 @@
               </a:spcAft>
             </a:pPr>
             <a:r>
-              <a:rPr sz="1350" b="1" i="0">
+              <a:rPr sz="1300" b="1" i="0">
                 <a:solidFill>
                   <a:srgbClr val="E8A93B"/>
                 </a:solidFill>
                 <a:latin typeface="맑은 고딕"/>
                 <a:ea typeface="맑은 고딕"/>
               </a:rPr>
-              <a:t>핵심: </a:t>
-            </a:r>
-            <a:r>
-              <a:rPr sz="1350" b="0" i="0">
+              <a:t>반등의 조짐인가?  </a:t>
+            </a:r>
+            <a:r>
+              <a:rPr sz="1200" b="0" i="0">
                 <a:solidFill>
                   <a:srgbClr val="FFFFFF"/>
                 </a:solidFill>
                 <a:latin typeface="맑은 고딕"/>
                 <a:ea typeface="맑은 고딕"/>
               </a:rPr>
-              <a:t>3거래일 새 ±10~15%의 롤러코스터는 펀더멘털 훼손이 아니라 수급·파생·심리發 변동성. ADR 본주와 달리 견조($168 유지)하고 2Q 실적은 사상 최대. </a:t>
-            </a:r>
-            <a:r>
-              <a:rPr sz="1350" b="1" i="0">
+              <a:t>외국인 현·선물 + 기관 순매수는 수급 개선의 긍정적 필요조건. 다만 급락 원인(피크아웃 우려·레버리지 ETF·지정학)이 해소된 것은 아니며, 1일 저가매수 반등은 기술적 되돌림일 수 있어 확증은 이르다. </a:t>
+            </a:r>
+            <a:r>
+              <a:rPr sz="1200" b="1" i="0">
                 <a:solidFill>
                   <a:srgbClr val="FFFFFF"/>
                 </a:solidFill>
                 <a:latin typeface="맑은 고딕"/>
                 <a:ea typeface="맑은 고딕"/>
               </a:rPr>
-              <a:t>급락은 눌림목 — 분할·역할분담·리스크관리로 대응.</a:t>
+              <a:t>2~3거래일 연속 순매수·주도주 복원 확인 전까지 분할·역할분담·리스크관리 유지.</a:t>
             </a:r>
           </a:p>
         </p:txBody>
@@ -15055,7 +15055,7 @@
                 <a:latin typeface="맑은 고딕"/>
                 <a:ea typeface="맑은 고딕"/>
               </a:rPr>
-              <a:t>자료: 한국거래소, 블룸버그, 한국투자증권, 언론보도 종합 (기준일 2026.7.14)</a:t>
+              <a:t>자료: 한국거래소, 블룸버그, 한국투자증권, 언론보도 종합 (기준일 2026.7.14 장 마감, 잠정)</a:t>
             </a:r>
           </a:p>
         </p:txBody>
@@ -16325,7 +16325,7 @@
                 <a:latin typeface="맑은 고딕"/>
                 <a:ea typeface="맑은 고딕"/>
               </a:rPr>
-              <a:t>6/25 고점 후 -38%, 7/13 -15.4%</a:t>
+              <a:t>6/25 고점 후 -36%, 7/14 반등</a:t>
             </a:r>
           </a:p>
         </p:txBody>
@@ -16371,7 +16371,7 @@
                 <a:latin typeface="맑은 고딕"/>
                 <a:ea typeface="맑은 고딕"/>
               </a:rPr>
-              <a:t>298.7만 → 184.5만원</a:t>
+              <a:t>298.7만 → 190만원</a:t>
             </a:r>
           </a:p>
         </p:txBody>
@@ -16509,7 +16509,7 @@
                 <a:latin typeface="맑은 고딕"/>
                 <a:ea typeface="맑은 고딕"/>
               </a:rPr>
-              <a:t>6/19 고점 후 -32%, 7/13 -10.7%</a:t>
+              <a:t>6/19 고점 후 -29%, 7/14 +5% 반등</a:t>
             </a:r>
           </a:p>
         </p:txBody>
@@ -16555,7 +16555,7 @@
                 <a:latin typeface="맑은 고딕"/>
                 <a:ea typeface="맑은 고딕"/>
               </a:rPr>
-              <a:t>37.5만 → 25.5만원</a:t>
+              <a:t>37.5만 → 26.8만원</a:t>
             </a:r>
           </a:p>
         </p:txBody>
@@ -19575,7 +19575,7 @@
                 <a:latin typeface="맑은 고딕"/>
                 <a:ea typeface="맑은 고딕"/>
               </a:rPr>
-              <a:t>상반기 삼성·하이닉스 129.7조 순매도(87%). 7/10 ADR 흥행에 코스피 +2.5% 급등 → 7/13 반전, 외국인 1.7조·기관 2.2조 순매도로 코스피 -8.95%·서킷브레이커.</a:t>
+              <a:t>7/13 외국인 1.7조·기관 2.2조 순매도로 코스피 -8.95%·서킷브레이커 → 7/14 저가매수 반전, 기관 +2조·외국인 +0.8조 동반 순매수(개인 -2.8조)·외국인 선물 순매수로 +1%대 반등.</a:t>
             </a:r>
           </a:p>
         </p:txBody>

--- a/반도체_고객세미나_2026.7.14.pptx
+++ b/반도체_고객세미나_2026.7.14.pptx
@@ -6411,7 +6411,7 @@
                 <a:latin typeface="맑은 고딕"/>
                 <a:ea typeface="맑은 고딕"/>
               </a:rPr>
-              <a:t>12M fwd P/E 5배대, 현재가(약 190만원) 대비 큰 상승여력</a:t>
+              <a:t>12M fwd P/E 5배대, 현재가(약 193만원) 대비 큰 상승여력</a:t>
             </a:r>
           </a:p>
         </p:txBody>
@@ -14899,7 +14899,7 @@
                 <a:latin typeface="맑은 고딕"/>
                 <a:ea typeface="맑은 고딕"/>
               </a:rPr>
-              <a:t>저가매수 유입, 코스피 +1%대(약 6,880). 삼성전자 +5%대(약 26.8만)·SK하이닉스 +3~4%(190만선 회복). 현물서 외국인 +0.8조·기관 +2조 동반 순매수 + 외국인 선물 순매수(개인 -2.8조).</a:t>
+              <a:t>저가매수 유입, 코스피 +0.99%(6,874.45). 삼성전자 +5.9%(약 26.9만)·SK하이닉스 +4.5%(약 193만, 190만선 회복). 현물서 외국인 +0.8조·기관 +2조 동반 순매수 + 외국인 선물 순매수(개인 -2.8조).</a:t>
             </a:r>
           </a:p>
         </p:txBody>
@@ -15055,7 +15055,7 @@
                 <a:latin typeface="맑은 고딕"/>
                 <a:ea typeface="맑은 고딕"/>
               </a:rPr>
-              <a:t>자료: 한국거래소, 블룸버그, 한국투자증권, 언론보도 종합 (기준일 2026.7.14 장 마감, 잠정)</a:t>
+              <a:t>자료: 한국거래소(KRX), 블룸버그, 한국투자증권, 언론보도 종합 (기준일 2026.7.14 KRX 종가 15:30)</a:t>
             </a:r>
           </a:p>
         </p:txBody>
@@ -16325,7 +16325,7 @@
                 <a:latin typeface="맑은 고딕"/>
                 <a:ea typeface="맑은 고딕"/>
               </a:rPr>
-              <a:t>6/25 고점 후 -36%, 7/14 반등</a:t>
+              <a:t>6/25 고점 후 -35%, 7/14 +4.5%</a:t>
             </a:r>
           </a:p>
         </p:txBody>
@@ -16371,7 +16371,7 @@
                 <a:latin typeface="맑은 고딕"/>
                 <a:ea typeface="맑은 고딕"/>
               </a:rPr>
-              <a:t>298.7만 → 190만원</a:t>
+              <a:t>298.7만 → 193만원</a:t>
             </a:r>
           </a:p>
         </p:txBody>
@@ -16509,7 +16509,7 @@
                 <a:latin typeface="맑은 고딕"/>
                 <a:ea typeface="맑은 고딕"/>
               </a:rPr>
-              <a:t>6/19 고점 후 -29%, 7/14 +5% 반등</a:t>
+              <a:t>6/19 고점 후 -28%, 7/14 +5.9%</a:t>
             </a:r>
           </a:p>
         </p:txBody>
@@ -16555,7 +16555,7 @@
                 <a:latin typeface="맑은 고딕"/>
                 <a:ea typeface="맑은 고딕"/>
               </a:rPr>
-              <a:t>37.5만 → 26.8만원</a:t>
+              <a:t>37.5만 → 26.9만원</a:t>
             </a:r>
           </a:p>
         </p:txBody>
@@ -19575,7 +19575,7 @@
                 <a:latin typeface="맑은 고딕"/>
                 <a:ea typeface="맑은 고딕"/>
               </a:rPr>
-              <a:t>7/13 외국인 1.7조·기관 2.2조 순매도로 코스피 -8.95%·서킷브레이커 → 7/14 저가매수 반전, 기관 +2조·외국인 +0.8조 동반 순매수(개인 -2.8조)·외국인 선물 순매수로 +1%대 반등.</a:t>
+              <a:t>7/13 외국인 1.7조·기관 2.2조 순매도로 코스피 -8.95%·서킷브레이커 → 7/14 저가매수 반전, 기관 +2조·외국인 +0.8조 동반 순매수(개인 -2.8조)·외국인 선물 순매수로 코스피 +0.99%(6,874.45) 반등 마감.</a:t>
             </a:r>
           </a:p>
         </p:txBody>

--- a/반도체_고객세미나_2026.7.14.pptx
+++ b/반도체_고객세미나_2026.7.14.pptx
@@ -6411,7 +6411,7 @@
                 <a:latin typeface="맑은 고딕"/>
                 <a:ea typeface="맑은 고딕"/>
               </a:rPr>
-              <a:t>12M fwd P/E 5배대, 현재가(약 193만원) 대비 큰 상승여력</a:t>
+              <a:t>12M fwd P/E 5배대, 현재가(약 191만원) 대비 큰 상승여력</a:t>
             </a:r>
           </a:p>
         </p:txBody>
@@ -14899,7 +14899,7 @@
                 <a:latin typeface="맑은 고딕"/>
                 <a:ea typeface="맑은 고딕"/>
               </a:rPr>
-              <a:t>저가매수 유입, 코스피 +0.99%(6,874.45). 삼성전자 +5.9%(약 26.9만)·SK하이닉스 +4.5%(약 193만, 190만선 회복). 현물서 외국인 +0.8조·기관 +2조 동반 순매수 + 외국인 선물 순매수(개인 -2.8조).</a:t>
+              <a:t>저가매수 유입, 코스피 +0.73%(6,856.83). 삼성전자 +3.34%(263,000원)·SK하이닉스 +3.69%(1,913,000원, 190만선 회복). 현물서 외국인 +0.8조·기관 +2조 동반 순매수 + 외국인 선물 순매수(개인 -2.8조).</a:t>
             </a:r>
           </a:p>
         </p:txBody>
@@ -16325,7 +16325,7 @@
                 <a:latin typeface="맑은 고딕"/>
                 <a:ea typeface="맑은 고딕"/>
               </a:rPr>
-              <a:t>6/25 고점 후 -35%, 7/14 +4.5%</a:t>
+              <a:t>6/25 고점 후 -36%, 7/14 +3.7%</a:t>
             </a:r>
           </a:p>
         </p:txBody>
@@ -16371,7 +16371,7 @@
                 <a:latin typeface="맑은 고딕"/>
                 <a:ea typeface="맑은 고딕"/>
               </a:rPr>
-              <a:t>298.7만 → 193만원</a:t>
+              <a:t>298.7만 → 191.3만원</a:t>
             </a:r>
           </a:p>
         </p:txBody>
@@ -16509,7 +16509,7 @@
                 <a:latin typeface="맑은 고딕"/>
                 <a:ea typeface="맑은 고딕"/>
               </a:rPr>
-              <a:t>6/19 고점 후 -28%, 7/14 +5.9%</a:t>
+              <a:t>6/19 고점 후 -30%, 7/14 +3.3%</a:t>
             </a:r>
           </a:p>
         </p:txBody>
@@ -16555,7 +16555,7 @@
                 <a:latin typeface="맑은 고딕"/>
                 <a:ea typeface="맑은 고딕"/>
               </a:rPr>
-              <a:t>37.5만 → 26.9만원</a:t>
+              <a:t>37.5만 → 26.3만원</a:t>
             </a:r>
           </a:p>
         </p:txBody>
@@ -19575,7 +19575,7 @@
                 <a:latin typeface="맑은 고딕"/>
                 <a:ea typeface="맑은 고딕"/>
               </a:rPr>
-              <a:t>7/13 외국인 1.7조·기관 2.2조 순매도로 코스피 -8.95%·서킷브레이커 → 7/14 저가매수 반전, 기관 +2조·외국인 +0.8조 동반 순매수(개인 -2.8조)·외국인 선물 순매수로 코스피 +0.99%(6,874.45) 반등 마감.</a:t>
+              <a:t>7/13 외국인 1.7조·기관 2.2조 순매도로 코스피 -8.95%·서킷브레이커 → 7/14 저가매수 반전, 기관 +2조·외국인 +0.8조 동반 순매수(개인 -2.8조)·외국인 선물 순매수로 코스피 +0.73%(6,856.83) 반등 마감.</a:t>
             </a:r>
           </a:p>
         </p:txBody>

--- a/반도체_고객세미나_2026.7.14.pptx
+++ b/반도체_고객세미나_2026.7.14.pptx
@@ -6411,7 +6411,7 @@
                 <a:latin typeface="맑은 고딕"/>
                 <a:ea typeface="맑은 고딕"/>
               </a:rPr>
-              <a:t>12M fwd P/E 5배대, 현재가(약 191만원) 대비 큰 상승여력</a:t>
+              <a:t>12M fwd P/E 5배대, 현재가(191.3만원, 7/14 종가) 대비 큰 상승여력</a:t>
             </a:r>
           </a:p>
         </p:txBody>
@@ -7085,7 +7085,7 @@
                 <a:latin typeface="맑은 고딕"/>
                 <a:ea typeface="맑은 고딕"/>
               </a:rPr>
-              <a:t>SK하이닉스 ③ — 나스닥 ADR: 흥행 신호와 본주 영향</a:t>
+              <a:t>SK하이닉스 ③ — ADR은 대흥행, 본주는 왜 급락했나 (vs TSMC)</a:t>
             </a:r>
           </a:p>
         </p:txBody>
@@ -8336,7 +8336,7 @@
                 <a:latin typeface="맑은 고딕"/>
                 <a:ea typeface="맑은 고딕"/>
               </a:rPr>
-              <a:t>신주 2.5% 희석 + 역유입 + 고점 조정. → 7/13 현실화: ADR 흥행이 차익실현 빌미, 본주 -15.4%·서킷브레이커.</a:t>
+              <a:t>차익실현·신주 2.5% 희석·피크아웃 우려로 7/13 본주 -15.4%(서킷). ADR·본주 동반강세였던 TSMC와 대조 — 단 ADR $168 견조로 일시 조정.</a:t>
             </a:r>
           </a:p>
         </p:txBody>
@@ -9543,7 +9543,7 @@
                 <a:latin typeface="맑은 고딕"/>
                 <a:ea typeface="맑은 고딕"/>
               </a:rPr>
-              <a:t>최고 61만(SK증권)·미래에셋 55만, 2026E P/E 5~6배 저평가</a:t>
+              <a:t>최고 61만(SK증권)·KB 60만 상향, 2026E P/E 5~6배 저평가</a:t>
             </a:r>
           </a:p>
         </p:txBody>
@@ -16325,7 +16325,7 @@
                 <a:latin typeface="맑은 고딕"/>
                 <a:ea typeface="맑은 고딕"/>
               </a:rPr>
-              <a:t>6/25 고점 후 -36%, 7/14 +3.7%</a:t>
+              <a:t>6/25 고점 후 -36.0%, 7/14 +3.7%</a:t>
             </a:r>
           </a:p>
         </p:txBody>
@@ -16509,7 +16509,7 @@
                 <a:latin typeface="맑은 고딕"/>
                 <a:ea typeface="맑은 고딕"/>
               </a:rPr>
-              <a:t>6/19 고점 후 -30%, 7/14 +3.3%</a:t>
+              <a:t>6/19 고점 후 -29.9%, 7/14 +3.3%</a:t>
             </a:r>
           </a:p>
         </p:txBody>
@@ -19109,7 +19109,7 @@
         </p:nvSpPr>
         <p:spPr>
           <a:xfrm>
-            <a:off x="566928" y="4892040"/>
+            <a:off x="566928" y="5452000"/>
             <a:ext cx="5440680" cy="960120"/>
           </a:xfrm>
           <a:prstGeom prst="roundRect">
@@ -19155,7 +19155,7 @@
         </p:nvSpPr>
         <p:spPr>
           <a:xfrm>
-            <a:off x="822960" y="4892040"/>
+            <a:off x="822960" y="5452000"/>
             <a:ext cx="4937760" cy="960120"/>
           </a:xfrm>
           <a:prstGeom prst="rect">
@@ -19757,7 +19757,7 @@
                 <a:latin typeface="맑은 고딕"/>
                 <a:ea typeface="맑은 고딕"/>
               </a:rPr>
-              <a:t>6/4 사상최대 139.7조 → 7월 초 약 112조(한 달 -27.5조). 개인 '실탄' 소진과 변동성 회피.</a:t>
+              <a:t>6/4 사상최대 139.7조 → 7/9 107.1조(5개월 만 최저·110조 붕괴). 급락에 개인 '실탄' 소진·빚투 청산.</a:t>
             </a:r>
           </a:p>
         </p:txBody>

--- a/반도체_고객세미나_2026.7.14.pptx
+++ b/반도체_고객세미나_2026.7.14.pptx
@@ -5138,7 +5138,7 @@
                 <a:latin typeface="맑은 고딕"/>
                 <a:ea typeface="맑은 고딕"/>
               </a:rPr>
-              <a:t>2026년 7월 14일</a:t>
+              <a:t>2026년 7월 15일</a:t>
             </a:r>
             <a:r>
               <a:rPr sz="1400" b="0" i="0">
@@ -5194,7 +5194,7 @@
                 <a:latin typeface="맑은 고딕"/>
                 <a:ea typeface="맑은 고딕"/>
               </a:rPr>
-              <a:t>※ 본 자료의 주가·실적·목표주가는 2026.7.14 기준 보도 및 컨센서스를 종합한 것으로, 실제와 차이가 있을 수 있으며 발표 전 최신 IR/컨센서스 재확인이 필요합니다.</a:t>
+              <a:t>※ 본 자료의 주가·실적·목표주가는 2026.7.14 KRX 종가·미국 7.14장 기준 보도 및 컨센서스를 종합한 것으로, 실제와 차이가 있을 수 있으며 발표 전 최신 IR/컨센서스 재확인이 필요합니다.</a:t>
             </a:r>
           </a:p>
         </p:txBody>
@@ -7085,7 +7085,7 @@
                 <a:latin typeface="맑은 고딕"/>
                 <a:ea typeface="맑은 고딕"/>
               </a:rPr>
-              <a:t>SK하이닉스 ③ — ADR은 대흥행, 본주는 왜 급락했나 (vs TSMC)</a:t>
+              <a:t>SK하이닉스 ③ — ADR +27% 급등·바클레이즈 $330, 본주는 왜 급락했나</a:t>
             </a:r>
           </a:p>
         </p:txBody>
@@ -7131,7 +7131,7 @@
                 <a:latin typeface="맑은 고딕"/>
                 <a:ea typeface="맑은 고딕"/>
               </a:rPr>
-              <a:t>① 미국 IPO 대흥행  (7/10 +13% 데뷔, 7/13 SKHY 정식거래·$168 견조)</a:t>
+              <a:t>① ADR 대흥행 → 7/14 미국장 +27% 급등 (7/13 $152 → $193, 美 IPO 사상 2위)</a:t>
             </a:r>
           </a:p>
         </p:txBody>
@@ -7661,7 +7661,7 @@
                 <a:latin typeface="맑은 고딕"/>
                 <a:ea typeface="맑은 고딕"/>
               </a:rPr>
-              <a:t>+13% 데뷔</a:t>
+              <a:t>목표 $330</a:t>
             </a:r>
           </a:p>
         </p:txBody>
@@ -7707,7 +7707,7 @@
                 <a:latin typeface="맑은 고딕"/>
                 <a:ea typeface="맑은 고딕"/>
               </a:rPr>
-              <a:t>공모가 $149·조달 $265억, 美 IPO 사상 2위</a:t>
+              <a:t>바클레이즈 OW·2027 공급부족 ($152 대비 +117%)</a:t>
             </a:r>
           </a:p>
         </p:txBody>
@@ -8188,7 +8188,7 @@
                 <a:latin typeface="맑은 고딕"/>
                 <a:ea typeface="맑은 고딕"/>
               </a:rPr>
-              <a:t>ADR 프리미엄→순유입, 밸류 할인 완화. KB ‘본주·ADR 동시 재평가’ 목표 420만</a:t>
+              <a:t>ADR +27%·바클레이즈 $330(2027 공급부족)로 재평가 탄력. KB ‘본주·ADR 동시 재평가’ 목표 420만</a:t>
             </a:r>
           </a:p>
         </p:txBody>
@@ -8336,7 +8336,7 @@
                 <a:latin typeface="맑은 고딕"/>
                 <a:ea typeface="맑은 고딕"/>
               </a:rPr>
-              <a:t>차익실현·신주 2.5% 희석·피크아웃 우려로 7/13 본주 -15.4%(서킷). ADR·본주 동반강세였던 TSMC와 대조 — 단 ADR $168 견조로 일시 조정.</a:t>
+              <a:t>차익실현·신주 2.5% 희석·피크아웃 우려로 7/13 본주 -15.4%·ADR $152 동반 급락. 단 7/14 ADR +27% 반등(vs TSMC 프리미엄) → 일시 조정·본주 반등 기대.</a:t>
             </a:r>
           </a:p>
         </p:txBody>
@@ -14599,7 +14599,7 @@
                 <a:latin typeface="맑은 고딕"/>
                 <a:ea typeface="맑은 고딕"/>
               </a:rPr>
-              <a:t>최근 급변동 — 급등·폭락·반등의 3거래일 (7/10 → 7/14)</a:t>
+              <a:t>최근 급변동 — 급등·폭락·반등의 3거래일 (7/10 → 7/15)</a:t>
             </a:r>
           </a:p>
         </p:txBody>
@@ -14913,7 +14913,7 @@
         <p:spPr>
           <a:xfrm>
             <a:off x="566928" y="4520000"/>
-            <a:ext cx="11064240" cy="1260000"/>
+            <a:ext cx="11064240" cy="1560000"/>
           </a:xfrm>
           <a:prstGeom prst="roundRect">
             <a:avLst>
@@ -14959,7 +14959,7 @@
         <p:spPr>
           <a:xfrm>
             <a:off x="820000" y="4575000"/>
-            <a:ext cx="10560000" cy="1150000"/>
+            <a:ext cx="10560000" cy="1460000"/>
           </a:xfrm>
           <a:prstGeom prst="rect">
             <a:avLst/>
@@ -14999,7 +14999,7 @@
                 <a:latin typeface="맑은 고딕"/>
                 <a:ea typeface="맑은 고딕"/>
               </a:rPr>
-              <a:t>외국인 현·선물 + 기관 순매수는 수급 개선의 긍정적 필요조건. 다만 급락 원인(피크아웃 우려·레버리지 ETF·지정학)이 해소된 것은 아니며, 1일 저가매수 반등은 기술적 되돌림일 수 있어 확증은 이르다. </a:t>
+              <a:t>외국인 현·선물+기관 순매수에 더해 7/14 미국장 SK ADR +27%·바클레이즈 목표 $330(2027 공급부족)까지, 우호 신호가 누적. 다만 급락 원인이 완전히 해소된 것은 아니어서 1일 반등의 되돌림 여지도 상존. </a:t>
             </a:r>
             <a:r>
               <a:rPr sz="1200" b="1" i="0">
@@ -20997,7 +20997,7 @@
                 <a:latin typeface="맑은 고딕"/>
                 <a:ea typeface="맑은 고딕"/>
               </a:rPr>
-              <a:t>BofA ‘1990년대급 슈퍼사이클’(DRAM +51%). 골드만·UBS 강세 유지 — HBM 가격 상향, SK 하이닉스 Rubin 물량 우위.</a:t>
+              <a:t>BofA ‘1990년대급 슈퍼사이클’(DRAM +51%). 골드만·UBS 강세 유지, 바클레이즈 '2027 공급부족 심화'(DRAM 수요 +35% vs 공급 +20%) — HBM 가격 상향, SK 하이닉스 Rubin 물량 우위·ADR 목표 $330.</a:t>
             </a:r>
           </a:p>
         </p:txBody>
